--- a/docs/code_maps_pptx/fmri_data_hansen_neurotransmitter_maps_codemap.pptx
+++ b/docs/code_maps_pptx/fmri_data_hansen_neurotransmitter_maps_codemap.pptx
@@ -3112,7 +3112,7 @@
           <a:p>
             <a:pPr algn="ctr"/>
             <a:r>
-              <a:rPr sz="1900" b="1">
+              <a:rPr sz="1700" b="1">
                 <a:solidFill>
                   <a:srgbClr val="262626"/>
                 </a:solidFill>
@@ -3936,8 +3936,8 @@
                 </a:solidFill>
                 <a:latin typeface="Calibri"/>
               </a:rPr>
-              <a:t>Hansen 2022
-PET tracer NIfTIs</a:t>
+              <a:t>hansen22.mat
+(load_image_set)</a:t>
             </a:r>
           </a:p>
         </p:txBody>
